--- a/public/fun/pack/pptx/birthdaypro/돌잔치프리미엄_28_사진중심_올리브브론즈.pptx
+++ b/public/fun/pack/pptx/birthdaypro/돌잔치프리미엄_28_사진중심_올리브브론즈.pptx
@@ -112,12 +112,12 @@
   <p:extLst>
     <p:ext uri="{521415D9-36F7-43E2-AB2F-B90AF26B5E84}">
       <p14:sectionLst xmlns:p14="http://schemas.microsoft.com/office/powerpoint/2010/main">
-        <p14:section name="시작" id="{2E181DB6-E3AD-4B95-B31E-0DC5F1DB616A}">
+        <p14:section name="시작" id="{7E9E2090-0D7D-469A-8F8D-099B25FBBE55}">
           <p14:sldIdLst>
             <p14:sldId id="256"/>
           </p14:sldIdLst>
         </p14:section>
-        <p14:section name="본문" id="{73755BDE-17F9-436F-9915-4180D88BCEE4}">
+        <p14:section name="본문" id="{70C54D86-0F9E-4C2B-AEF0-1E708C8D46FE}">
           <p14:sldIdLst>
             <p14:sldId id="257"/>
             <p14:sldId id="258"/>
@@ -125,7 +125,7 @@
             <p14:sldId id="260"/>
           </p14:sldIdLst>
         </p14:section>
-        <p14:section name="마무리" id="{15FACE0F-D638-438A-97FF-0B2201EFA832}">
+        <p14:section name="마무리" id="{F0BE6E98-02F9-4303-AC63-2618E0C9C428}">
           <p14:sldIdLst>
             <p14:sldId id="261"/>
           </p14:sldIdLst>
@@ -1447,7 +1447,7 @@
             </a:lvl1pPr>
           </a:lstStyle>
           <a:p>
-            <a:fld id="{54CB5DF9-C3BF-476D-8EB4-F0F580AC42C2}" type="slidenum">
+            <a:fld id="{0EC876D6-971E-46CF-A70E-67E6F306B0F6}" type="slidenum">
               <a:rPr lang="en-US"/>
               <a:t>‹#›</a:t>
             </a:fld>
@@ -2173,7 +2173,7 @@
             </a:lvl1pPr>
           </a:lstStyle>
           <a:p>
-            <a:fld id="{DBADAB3D-71B8-4B5C-89CD-3390D9AC0D89}" type="slidenum">
+            <a:fld id="{E5602484-121E-4A81-92A5-CD52B6B182C6}" type="slidenum">
               <a:rPr lang="en-US"/>
               <a:t>‹#›</a:t>
             </a:fld>
@@ -2922,7 +2922,7 @@
             </a:lvl1pPr>
           </a:lstStyle>
           <a:p>
-            <a:fld id="{1642BED8-C1F1-4AF1-BFE6-08DCC4C0F4E4}" type="slidenum">
+            <a:fld id="{4207150D-46DB-4760-9DE1-11DE9E6B5134}" type="slidenum">
               <a:rPr lang="en-US"/>
               <a:t>‹#›</a:t>
             </a:fld>
@@ -3829,7 +3829,7 @@
           <a:p>
             <a:r>
               <a:rPr lang="ko-KR"/>
-              <a:t>아기 이름 · 0000. 00. 00</a:t>
+              <a:t>아기 이름 · 날짜 입력</a:t>
             </a:r>
           </a:p>
           <a:p>
@@ -4012,7 +4012,7 @@
           <a:bodyPr/>
           <a:lstStyle/>
           <a:p>
-            <a:fld id="{E3526FE2-5FD8-4BA6-BB16-170628047495}" type="slidenum">
+            <a:fld id="{813AA2AB-E896-46F0-913C-3835C851BFE4}" type="slidenum">
               <a:rPr lang="en-US"/>
               <a:t>‹#›</a:t>
             </a:fld>
@@ -4774,7 +4774,7 @@
           <a:bodyPr/>
           <a:lstStyle/>
           <a:p>
-            <a:fld id="{C8665630-95BD-45E3-A49E-4AAFE64AEA94}" type="slidenum">
+            <a:fld id="{4B148404-75F3-4CE6-A050-68A3A9F98E73}" type="slidenum">
               <a:rPr lang="en-US"/>
               <a:t>‹#›</a:t>
             </a:fld>
@@ -4884,7 +4884,7 @@
           <a:bodyPr/>
           <a:lstStyle/>
           <a:p>
-            <a:fld id="{EA3C04DF-02B2-4D32-9FC2-8ECDAF03AD31}" type="slidenum">
+            <a:fld id="{67928974-B60C-4847-8DED-CA0B380DFBB1}" type="slidenum">
               <a:rPr lang="en-US"/>
               <a:t>‹#›</a:t>
             </a:fld>
@@ -6344,7 +6344,7 @@
           <a:bodyPr/>
           <a:lstStyle/>
           <a:p>
-            <a:fld id="{0535CA52-1572-4D4C-85B8-138F72F7777D}" type="slidenum">
+            <a:fld id="{073D2135-FB4B-483E-B39B-C958DA7B4E7D}" type="slidenum">
               <a:rPr lang="en-US"/>
               <a:t>‹#›</a:t>
             </a:fld>
